--- a/docs/algorithm/FAM_Algorithm.pptx
+++ b/docs/algorithm/FAM_Algorithm.pptx
@@ -3805,7 +3805,7 @@
                 </a:solidFill>
                 <a:latin typeface="Calibri"/>
               </a:rPr>
-              <a:t>•  The NFL, NBA, MLB and NHL teams are seeded into the category tree under their leagues, so one fan's team is a subject from their first search.</a:t>
+              <a:t>•  Most NFL, NBA, MLB and NHL teams are seeded into the category tree under their leagues, so one fan's team is a subject from their first search. A team whose name is also weather or the news ('Carolina Hurricanes') is left to grow from real sports questions.</a:t>
             </a:r>
           </a:p>
         </p:txBody>
@@ -3844,7 +3844,7 @@
                 </a:solidFill>
                 <a:latin typeface="Calibri"/>
               </a:rPr>
-              <a:t>§202 in PROBLEMS.md  ·  fingerprint b2961ad9b5524ee7</a:t>
+              <a:t>§202 in PROBLEMS.md  ·  fingerprint 8ff02e6b227dbdaa</a:t>
             </a:r>
           </a:p>
         </p:txBody>
@@ -7152,7 +7152,7 @@
                 </a:solidFill>
                 <a:latin typeface="Calibri"/>
               </a:rPr>
-              <a:t>•  Every NFL, NBA, MLB and NHL team is seeded under its league</a:t>
+              <a:t>•  Most NFL, NBA, MLB and NHL teams are seeded under their league</a:t>
             </a:r>
           </a:p>
         </p:txBody>
